--- a/courseware/DSA_CH01_Overview_ADT_Complexity.pptx
+++ b/courseware/DSA_CH01_Overview_ADT_Complexity.pptx
@@ -6575,7 +6575,7 @@
         <p:spPr>
           <a:xfrm>
             <a:off x="566928" y="1298448"/>
-            <a:ext cx="11057839" cy="3350260"/>
+            <a:ext cx="11057839" cy="4117975"/>
           </a:xfrm>
           <a:prstGeom prst="rect">
             <a:avLst/>
@@ -6621,7 +6621,7 @@
         <p:spPr>
           <a:xfrm>
             <a:off x="822960" y="1399032"/>
-            <a:ext cx="10545775" cy="3149092"/>
+            <a:ext cx="10545775" cy="3916807"/>
           </a:xfrm>
           <a:prstGeom prst="rect">
             <a:avLst/>
@@ -6699,7 +6699,7 @@
                 <a:latin typeface="Consolas"/>
                 <a:ea typeface="Consolas"/>
               </a:rPr>
-              <a:t>    // 取 int 上限的 1/4，给 a + b 留余量：用 max() 相加就是整数溢出</a:t>
+              <a:t>    // infinity 只表示「没有直接路线」；每段时间都必须小于它</a:t>
             </a:r>
           </a:p>
           <a:p>
@@ -6745,7 +6745,7 @@
                 <a:latin typeface="Consolas"/>
                 <a:ea typeface="Consolas"/>
               </a:rPr>
-              <a:t> </a:t>
+              <a:t>    // 最短时间是若干段之和，用 64 位存；「到不了」另记 unreachable</a:t>
             </a:r>
           </a:p>
           <a:p>
@@ -6768,7 +6768,7 @@
                 <a:latin typeface="Consolas"/>
                 <a:ea typeface="Consolas"/>
               </a:rPr>
-              <a:t>    explicit RumorNetwork(std::size_t people);                    // 建 n x n 距离矩阵</a:t>
+              <a:t>    using distance_type = std::int64_t;</a:t>
             </a:r>
           </a:p>
           <a:p>
@@ -6791,7 +6791,7 @@
                 <a:latin typeface="Consolas"/>
                 <a:ea typeface="Consolas"/>
               </a:rPr>
-              <a:t>    void add_route(std::size_t from, std::size_t to, int cost);   // 加一条有向边</a:t>
+              <a:t>    static constexpr distance_type unreachable =</a:t>
             </a:r>
           </a:p>
           <a:p>
@@ -6814,7 +6814,7 @@
                 <a:latin typeface="Consolas"/>
                 <a:ea typeface="Consolas"/>
               </a:rPr>
-              <a:t>    [[nodiscard]] std::optional&lt;std::size_t&gt; best_source() const; // 算答案</a:t>
+              <a:t>        std::numeric_limits&lt;distance_type&gt;::max();</a:t>
             </a:r>
           </a:p>
           <a:p>
@@ -6837,7 +6837,7 @@
                 <a:latin typeface="Consolas"/>
                 <a:ea typeface="Consolas"/>
               </a:rPr>
-              <a:t> </a:t>
+              <a:t>    explicit RumorNetwork(std::size_t people);                    // 建 n x n 距离矩阵</a:t>
             </a:r>
           </a:p>
           <a:p>
@@ -6860,7 +6860,7 @@
                 <a:latin typeface="Consolas"/>
                 <a:ea typeface="Consolas"/>
               </a:rPr>
-              <a:t>private:</a:t>
+              <a:t>    void add_route(std::size_t from, std::size_t to, int cost);   // 加一条有向边</a:t>
             </a:r>
           </a:p>
           <a:p>
@@ -6883,7 +6883,7 @@
                 <a:latin typeface="Consolas"/>
                 <a:ea typeface="Consolas"/>
               </a:rPr>
-              <a:t>    std::vector&lt;std::vector&lt;int&gt;&gt; distance_;    // 相邻矩阵；末尾下划线 = 私有成员</a:t>
+              <a:t>    [[nodiscard]] std::optional&lt;std::size_t&gt; best_source() const; // 算答案</a:t>
             </a:r>
           </a:p>
           <a:p>
@@ -6906,6 +6906,75 @@
                 <a:latin typeface="Consolas"/>
                 <a:ea typeface="Consolas"/>
               </a:rPr>
+              <a:t> </a:t>
+            </a:r>
+          </a:p>
+          <a:p>
+            <a:pPr algn="l">
+              <a:lnSpc>
+                <a:spcPts val="2015"/>
+              </a:lnSpc>
+              <a:spcBef>
+                <a:spcPts val="0"/>
+              </a:spcBef>
+              <a:spcAft>
+                <a:spcPts val="0"/>
+              </a:spcAft>
+            </a:pPr>
+            <a:r>
+              <a:rPr sz="1550" b="0" i="0">
+                <a:solidFill>
+                  <a:srgbClr val="242A33"/>
+                </a:solidFill>
+                <a:latin typeface="Consolas"/>
+                <a:ea typeface="Consolas"/>
+              </a:rPr>
+              <a:t>private:</a:t>
+            </a:r>
+          </a:p>
+          <a:p>
+            <a:pPr algn="l">
+              <a:lnSpc>
+                <a:spcPts val="2015"/>
+              </a:lnSpc>
+              <a:spcBef>
+                <a:spcPts val="0"/>
+              </a:spcBef>
+              <a:spcAft>
+                <a:spcPts val="0"/>
+              </a:spcAft>
+            </a:pPr>
+            <a:r>
+              <a:rPr sz="1550" b="0" i="0">
+                <a:solidFill>
+                  <a:srgbClr val="242A33"/>
+                </a:solidFill>
+                <a:latin typeface="Consolas"/>
+                <a:ea typeface="Consolas"/>
+              </a:rPr>
+              <a:t>    std::vector&lt;std::vector&lt;int&gt;&gt; distance_;    // 相邻矩阵；末尾下划线 = 私有成员</a:t>
+            </a:r>
+          </a:p>
+          <a:p>
+            <a:pPr algn="l">
+              <a:lnSpc>
+                <a:spcPts val="2015"/>
+              </a:lnSpc>
+              <a:spcBef>
+                <a:spcPts val="0"/>
+              </a:spcBef>
+              <a:spcAft>
+                <a:spcPts val="0"/>
+              </a:spcAft>
+            </a:pPr>
+            <a:r>
+              <a:rPr sz="1550" b="0" i="0">
+                <a:solidFill>
+                  <a:srgbClr val="242A33"/>
+                </a:solidFill>
+                <a:latin typeface="Consolas"/>
+                <a:ea typeface="Consolas"/>
+              </a:rPr>
               <a:t>};</a:t>
             </a:r>
           </a:p>
@@ -6919,7 +6988,7 @@
         </p:nvSpPr>
         <p:spPr>
           <a:xfrm>
-            <a:off x="566928" y="4767580"/>
+            <a:off x="566928" y="5535295"/>
             <a:ext cx="11057839" cy="329184"/>
           </a:xfrm>
           <a:prstGeom prst="rect">
@@ -7154,7 +7223,7 @@
         <p:spPr>
           <a:xfrm>
             <a:off x="566928" y="1298448"/>
-            <a:ext cx="11057839" cy="3606165"/>
+            <a:ext cx="11057839" cy="4443984"/>
           </a:xfrm>
           <a:prstGeom prst="rect">
             <a:avLst/>
@@ -7200,7 +7269,7 @@
         <p:spPr>
           <a:xfrm>
             <a:off x="822960" y="1399032"/>
-            <a:ext cx="10545775" cy="3404997"/>
+            <a:ext cx="10545775" cy="4242816"/>
           </a:xfrm>
           <a:prstGeom prst="rect">
             <a:avLst/>
@@ -7215,7 +7284,7 @@
           <a:p>
             <a:pPr algn="l">
               <a:lnSpc>
-                <a:spcPts val="2015"/>
+                <a:spcPts val="1821"/>
               </a:lnSpc>
               <a:spcBef>
                 <a:spcPts val="0"/>
@@ -7225,20 +7294,20 @@
               </a:spcAft>
             </a:pPr>
             <a:r>
-              <a:rPr sz="1550" b="0" i="0">
+              <a:rPr sz="1401" b="0" i="0">
                 <a:solidFill>
                   <a:srgbClr val="242A33"/>
                 </a:solidFill>
                 <a:latin typeface="Consolas"/>
                 <a:ea typeface="Consolas"/>
               </a:rPr>
-              <a:t>auto shortest = distance_;          // 复制一份，多次调用不改动原网络</a:t>
+              <a:t>const std::size_t people = distance_.size();</a:t>
             </a:r>
           </a:p>
           <a:p>
             <a:pPr algn="l">
               <a:lnSpc>
-                <a:spcPts val="2015"/>
+                <a:spcPts val="1821"/>
               </a:lnSpc>
               <a:spcBef>
                 <a:spcPts val="0"/>
@@ -7248,20 +7317,20 @@
               </a:spcAft>
             </a:pPr>
             <a:r>
-              <a:rPr sz="1550" b="0" i="0">
+              <a:rPr sz="1401" b="0" i="0">
                 <a:solidFill>
                   <a:srgbClr val="242A33"/>
                 </a:solidFill>
                 <a:latin typeface="Consolas"/>
                 <a:ea typeface="Consolas"/>
               </a:rPr>
-              <a:t> </a:t>
+              <a:t>std::vector&lt;std::vector&lt;distance_type&gt;&gt; shortest(               // 64 位，初值全是 unreachable</a:t>
             </a:r>
           </a:p>
           <a:p>
             <a:pPr algn="l">
               <a:lnSpc>
-                <a:spcPts val="2015"/>
+                <a:spcPts val="1821"/>
               </a:lnSpc>
               <a:spcBef>
                 <a:spcPts val="0"/>
@@ -7271,20 +7340,20 @@
               </a:spcAft>
             </a:pPr>
             <a:r>
-              <a:rPr sz="1550" b="0" i="0">
+              <a:rPr sz="1401" b="0" i="0">
                 <a:solidFill>
                   <a:srgbClr val="242A33"/>
                 </a:solidFill>
                 <a:latin typeface="Consolas"/>
                 <a:ea typeface="Consolas"/>
               </a:rPr>
-              <a:t>for (std::size_t via = 0; via &lt; shortest.size(); ++via) {          // 允许经过 via</a:t>
+              <a:t>    people, std::vector&lt;distance_type&gt;(people, unreachable));</a:t>
             </a:r>
           </a:p>
           <a:p>
             <a:pPr algn="l">
               <a:lnSpc>
-                <a:spcPts val="2015"/>
+                <a:spcPts val="1821"/>
               </a:lnSpc>
               <a:spcBef>
                 <a:spcPts val="0"/>
@@ -7294,20 +7363,20 @@
               </a:spcAft>
             </a:pPr>
             <a:r>
-              <a:rPr sz="1550" b="0" i="0">
+              <a:rPr sz="1401" b="0" i="0">
                 <a:solidFill>
                   <a:srgbClr val="242A33"/>
                 </a:solidFill>
                 <a:latin typeface="Consolas"/>
                 <a:ea typeface="Consolas"/>
               </a:rPr>
-              <a:t>    for (std::size_t from = 0; from &lt; shortest.size(); ++from) {   // 固定起点</a:t>
+              <a:t>for (std::size_t from = 0; from &lt; people; ++from)</a:t>
             </a:r>
           </a:p>
           <a:p>
             <a:pPr algn="l">
               <a:lnSpc>
-                <a:spcPts val="2015"/>
+                <a:spcPts val="1821"/>
               </a:lnSpc>
               <a:spcBef>
                 <a:spcPts val="0"/>
@@ -7317,20 +7386,20 @@
               </a:spcAft>
             </a:pPr>
             <a:r>
-              <a:rPr sz="1550" b="0" i="0">
+              <a:rPr sz="1401" b="0" i="0">
                 <a:solidFill>
                   <a:srgbClr val="242A33"/>
                 </a:solidFill>
                 <a:latin typeface="Consolas"/>
                 <a:ea typeface="Consolas"/>
               </a:rPr>
-              <a:t>        for (std::size_t to = 0; to &lt; shortest.size(); ++to) {     // 固定终点</a:t>
+              <a:t>    for (std::size_t to = 0; to &lt; people; ++to)</a:t>
             </a:r>
           </a:p>
           <a:p>
             <a:pPr algn="l">
               <a:lnSpc>
-                <a:spcPts val="2015"/>
+                <a:spcPts val="1821"/>
               </a:lnSpc>
               <a:spcBef>
                 <a:spcPts val="0"/>
@@ -7340,20 +7409,20 @@
               </a:spcAft>
             </a:pPr>
             <a:r>
-              <a:rPr sz="1550" b="0" i="0">
+              <a:rPr sz="1401" b="0" i="0">
                 <a:solidFill>
                   <a:srgbClr val="242A33"/>
                 </a:solidFill>
                 <a:latin typeface="Consolas"/>
                 <a:ea typeface="Consolas"/>
               </a:rPr>
-              <a:t>            if (shortest[from][via] != infinity &amp;&amp;                 // 两段都可达</a:t>
+              <a:t>        if (distance_[from][to] != infinity) shortest[from][to] = distance_[from][to];</a:t>
             </a:r>
           </a:p>
           <a:p>
             <a:pPr algn="l">
               <a:lnSpc>
-                <a:spcPts val="2015"/>
+                <a:spcPts val="1821"/>
               </a:lnSpc>
               <a:spcBef>
                 <a:spcPts val="0"/>
@@ -7363,20 +7432,20 @@
               </a:spcAft>
             </a:pPr>
             <a:r>
-              <a:rPr sz="1550" b="0" i="0">
+              <a:rPr sz="1401" b="0" i="0">
                 <a:solidFill>
                   <a:srgbClr val="242A33"/>
                 </a:solidFill>
                 <a:latin typeface="Consolas"/>
                 <a:ea typeface="Consolas"/>
               </a:rPr>
-              <a:t>                shortest[via][to] != infinity &amp;&amp;</a:t>
+              <a:t> </a:t>
             </a:r>
           </a:p>
           <a:p>
             <a:pPr algn="l">
               <a:lnSpc>
-                <a:spcPts val="2015"/>
+                <a:spcPts val="1821"/>
               </a:lnSpc>
               <a:spcBef>
                 <a:spcPts val="0"/>
@@ -7386,20 +7455,20 @@
               </a:spcAft>
             </a:pPr>
             <a:r>
-              <a:rPr sz="1550" b="0" i="0">
+              <a:rPr sz="1401" b="0" i="0">
                 <a:solidFill>
                   <a:srgbClr val="242A33"/>
                 </a:solidFill>
                 <a:latin typeface="Consolas"/>
                 <a:ea typeface="Consolas"/>
               </a:rPr>
-              <a:t>                shortest[from][to] &gt; shortest[from][via] + shortest[via][to]) {</a:t>
+              <a:t>for (std::size_t via = 0; via &lt; people; ++via) {                // 允许经过 via</a:t>
             </a:r>
           </a:p>
           <a:p>
             <a:pPr algn="l">
               <a:lnSpc>
-                <a:spcPts val="2015"/>
+                <a:spcPts val="1821"/>
               </a:lnSpc>
               <a:spcBef>
                 <a:spcPts val="0"/>
@@ -7409,20 +7478,20 @@
               </a:spcAft>
             </a:pPr>
             <a:r>
-              <a:rPr sz="1550" b="0" i="0">
+              <a:rPr sz="1401" b="0" i="0">
                 <a:solidFill>
                   <a:srgbClr val="242A33"/>
                 </a:solidFill>
                 <a:latin typeface="Consolas"/>
                 <a:ea typeface="Consolas"/>
               </a:rPr>
-              <a:t>                shortest[from][to] = shortest[from][via] + shortest[via][to];</a:t>
+              <a:t>    for (std::size_t from = 0; from &lt; people; ++from) {         // 固定起点</a:t>
             </a:r>
           </a:p>
           <a:p>
             <a:pPr algn="l">
               <a:lnSpc>
-                <a:spcPts val="2015"/>
+                <a:spcPts val="1821"/>
               </a:lnSpc>
               <a:spcBef>
                 <a:spcPts val="0"/>
@@ -7432,20 +7501,20 @@
               </a:spcAft>
             </a:pPr>
             <a:r>
-              <a:rPr sz="1550" b="0" i="0">
+              <a:rPr sz="1401" b="0" i="0">
                 <a:solidFill>
                   <a:srgbClr val="242A33"/>
                 </a:solidFill>
                 <a:latin typeface="Consolas"/>
                 <a:ea typeface="Consolas"/>
               </a:rPr>
-              <a:t>            }</a:t>
+              <a:t>        for (std::size_t to = 0; to &lt; people; ++to) {           // 固定终点</a:t>
             </a:r>
           </a:p>
           <a:p>
             <a:pPr algn="l">
               <a:lnSpc>
-                <a:spcPts val="2015"/>
+                <a:spcPts val="1821"/>
               </a:lnSpc>
               <a:spcBef>
                 <a:spcPts val="0"/>
@@ -7455,20 +7524,20 @@
               </a:spcAft>
             </a:pPr>
             <a:r>
-              <a:rPr sz="1550" b="0" i="0">
+              <a:rPr sz="1401" b="0" i="0">
                 <a:solidFill>
                   <a:srgbClr val="242A33"/>
                 </a:solidFill>
                 <a:latin typeface="Consolas"/>
                 <a:ea typeface="Consolas"/>
               </a:rPr>
-              <a:t>        }</a:t>
+              <a:t>            if (shortest[from][via] != unreachable &amp;&amp;           // 两段都可达</a:t>
             </a:r>
           </a:p>
           <a:p>
             <a:pPr algn="l">
               <a:lnSpc>
-                <a:spcPts val="2015"/>
+                <a:spcPts val="1821"/>
               </a:lnSpc>
               <a:spcBef>
                 <a:spcPts val="0"/>
@@ -7478,20 +7547,135 @@
               </a:spcAft>
             </a:pPr>
             <a:r>
-              <a:rPr sz="1550" b="0" i="0">
+              <a:rPr sz="1401" b="0" i="0">
                 <a:solidFill>
                   <a:srgbClr val="242A33"/>
                 </a:solidFill>
                 <a:latin typeface="Consolas"/>
                 <a:ea typeface="Consolas"/>
               </a:rPr>
+              <a:t>                shortest[via][to] != unreachable &amp;&amp;</a:t>
+            </a:r>
+          </a:p>
+          <a:p>
+            <a:pPr algn="l">
+              <a:lnSpc>
+                <a:spcPts val="1821"/>
+              </a:lnSpc>
+              <a:spcBef>
+                <a:spcPts val="0"/>
+              </a:spcBef>
+              <a:spcAft>
+                <a:spcPts val="0"/>
+              </a:spcAft>
+            </a:pPr>
+            <a:r>
+              <a:rPr sz="1401" b="0" i="0">
+                <a:solidFill>
+                  <a:srgbClr val="242A33"/>
+                </a:solidFill>
+                <a:latin typeface="Consolas"/>
+                <a:ea typeface="Consolas"/>
+              </a:rPr>
+              <a:t>                shortest[from][to] &gt; shortest[from][via] + shortest[via][to]) {</a:t>
+            </a:r>
+          </a:p>
+          <a:p>
+            <a:pPr algn="l">
+              <a:lnSpc>
+                <a:spcPts val="1821"/>
+              </a:lnSpc>
+              <a:spcBef>
+                <a:spcPts val="0"/>
+              </a:spcBef>
+              <a:spcAft>
+                <a:spcPts val="0"/>
+              </a:spcAft>
+            </a:pPr>
+            <a:r>
+              <a:rPr sz="1401" b="0" i="0">
+                <a:solidFill>
+                  <a:srgbClr val="242A33"/>
+                </a:solidFill>
+                <a:latin typeface="Consolas"/>
+                <a:ea typeface="Consolas"/>
+              </a:rPr>
+              <a:t>                shortest[from][to] = shortest[from][via] + shortest[via][to];</a:t>
+            </a:r>
+          </a:p>
+          <a:p>
+            <a:pPr algn="l">
+              <a:lnSpc>
+                <a:spcPts val="1821"/>
+              </a:lnSpc>
+              <a:spcBef>
+                <a:spcPts val="0"/>
+              </a:spcBef>
+              <a:spcAft>
+                <a:spcPts val="0"/>
+              </a:spcAft>
+            </a:pPr>
+            <a:r>
+              <a:rPr sz="1401" b="0" i="0">
+                <a:solidFill>
+                  <a:srgbClr val="242A33"/>
+                </a:solidFill>
+                <a:latin typeface="Consolas"/>
+                <a:ea typeface="Consolas"/>
+              </a:rPr>
+              <a:t>            }</a:t>
+            </a:r>
+          </a:p>
+          <a:p>
+            <a:pPr algn="l">
+              <a:lnSpc>
+                <a:spcPts val="1821"/>
+              </a:lnSpc>
+              <a:spcBef>
+                <a:spcPts val="0"/>
+              </a:spcBef>
+              <a:spcAft>
+                <a:spcPts val="0"/>
+              </a:spcAft>
+            </a:pPr>
+            <a:r>
+              <a:rPr sz="1401" b="0" i="0">
+                <a:solidFill>
+                  <a:srgbClr val="242A33"/>
+                </a:solidFill>
+                <a:latin typeface="Consolas"/>
+                <a:ea typeface="Consolas"/>
+              </a:rPr>
+              <a:t>        }</a:t>
+            </a:r>
+          </a:p>
+          <a:p>
+            <a:pPr algn="l">
+              <a:lnSpc>
+                <a:spcPts val="1821"/>
+              </a:lnSpc>
+              <a:spcBef>
+                <a:spcPts val="0"/>
+              </a:spcBef>
+              <a:spcAft>
+                <a:spcPts val="0"/>
+              </a:spcAft>
+            </a:pPr>
+            <a:r>
+              <a:rPr sz="1401" b="0" i="0">
+                <a:solidFill>
+                  <a:srgbClr val="242A33"/>
+                </a:solidFill>
+                <a:latin typeface="Consolas"/>
+                <a:ea typeface="Consolas"/>
+              </a:rPr>
               <a:t>    }</a:t>
             </a:r>
           </a:p>
           <a:p>
             <a:pPr algn="l">
               <a:lnSpc>
-                <a:spcPts val="2015"/>
+                <a:spcPts val="1821"/>
               </a:lnSpc>
               <a:spcBef>
                 <a:spcPts val="0"/>
@@ -7501,7 +7685,7 @@
               </a:spcAft>
             </a:pPr>
             <a:r>
-              <a:rPr sz="1550" b="0" i="0">
+              <a:rPr sz="1401" b="0" i="0">
                 <a:solidFill>
                   <a:srgbClr val="242A33"/>
                 </a:solidFill>
@@ -7521,7 +7705,7 @@
         </p:nvSpPr>
         <p:spPr>
           <a:xfrm>
-            <a:off x="566928" y="5023485"/>
+            <a:off x="566928" y="5861304"/>
             <a:ext cx="11057839" cy="329184"/>
           </a:xfrm>
           <a:prstGeom prst="rect">
@@ -7857,7 +8041,7 @@
                 <a:latin typeface="Consolas"/>
                 <a:ea typeface="Consolas"/>
               </a:rPr>
-              <a:t>int smallest_eccentricity = infinity;</a:t>
+              <a:t>distance_type smallest_eccentricity = unreachable;</a:t>
             </a:r>
           </a:p>
           <a:p>
@@ -7903,7 +8087,7 @@
                 <a:latin typeface="Consolas"/>
                 <a:ea typeface="Consolas"/>
               </a:rPr>
-              <a:t>for (std::size_t from = 0; from &lt; shortest.size(); ++from) {</a:t>
+              <a:t>for (std::size_t from = 0; from &lt; people; ++from) {</a:t>
             </a:r>
           </a:p>
           <a:p>
@@ -7926,7 +8110,7 @@
                 <a:latin typeface="Consolas"/>
                 <a:ea typeface="Consolas"/>
               </a:rPr>
-              <a:t>    int largest_distance = 0;</a:t>
+              <a:t>    distance_type largest_distance = 0;</a:t>
             </a:r>
           </a:p>
           <a:p>
@@ -7949,7 +8133,7 @@
                 <a:latin typeface="Consolas"/>
                 <a:ea typeface="Consolas"/>
               </a:rPr>
-              <a:t>    for (int distance : shortest[from]) {   // 这一行的最大值 = 该起点的完成时间</a:t>
+              <a:t>    for (distance_type distance : shortest[from]) {   // 这一行的最大值 = 该起点的完成时间</a:t>
             </a:r>
           </a:p>
           <a:p>

--- a/courseware/DSA_CH01_Overview_ADT_Complexity.pptx
+++ b/courseware/DSA_CH01_Overview_ADT_Complexity.pptx
@@ -27780,7 +27780,7 @@
                 <a:latin typeface="Segoe UI"/>
                 <a:ea typeface="微软雅黑"/>
               </a:rPr>
-              <a:t>345 道</a:t>
+              <a:t>344 道</a:t>
             </a:r>
             <a:r>
               <a:rPr sz="2000" b="0" i="0">
